--- a/docs/pptx/Ch11_SUPPLEMENT.pptx
+++ b/docs/pptx/Ch11_SUPPLEMENT.pptx
@@ -503,10 +503,23 @@
           <a:lstStyle/>
           <a:p>
             <a:r>
-              <a:rPr lang="en-US" dirty="0"/>
-              <a:t/>
-            </a:r>
-            <a:endParaRPr lang="en-US" dirty="0"/>
+              <a:t>PROF: Exercice M4/D3 — démontrer qu'un ADT résout un problème.</a:t>
+            </a:r>
+          </a:p>
+          <a:p>
+            <a:r>
+              <a:t>Scénario : gestion de file d'attente dans un hôpital.</a:t>
+            </a:r>
+          </a:p>
+          <a:p>
+            <a:r>
+              <a:t>1) Choisir l'ADT 2) Implémenter 3) Tester 4) Évaluer Big O.</a:t>
+            </a:r>
+          </a:p>
+          <a:p>
+            <a:r>
+              <a:t>Durée : 45 min.</a:t>
+            </a:r>
           </a:p>
         </p:txBody>
       </p:sp>
@@ -591,10 +604,18 @@
           <a:lstStyle/>
           <a:p>
             <a:r>
-              <a:rPr lang="en-US" dirty="0"/>
-              <a:t/>
-            </a:r>
-            <a:endParaRPr lang="en-US" dirty="0"/>
+              <a:t>PROF: Questions sur l'évaluation de complexité.</a:t>
+            </a:r>
+          </a:p>
+          <a:p>
+            <a:r>
+              <a:t>'Si mon code a une boucle de n et dedans un HashMap.get(), c'est O(?) → O(n×1) = O(n)'.</a:t>
+            </a:r>
+          </a:p>
+          <a:p>
+            <a:r>
+              <a:t>Faire calculer 5 cas.</a:t>
+            </a:r>
           </a:p>
         </p:txBody>
       </p:sp>
@@ -679,10 +700,13 @@
           <a:lstStyle/>
           <a:p>
             <a:r>
-              <a:rPr lang="en-US" dirty="0"/>
-              <a:t/>
-            </a:r>
-            <a:endParaRPr lang="en-US" dirty="0"/>
+              <a:t>PROF: Récap — M4 = DÉMONTRER (code + tests + résultats), D3 = ÉVALUER (Big O de chaque opération).</a:t>
+            </a:r>
+          </a:p>
+          <a:p>
+            <a:r>
+              <a:t>Ce n'est pas juste coder, c'est PROUVER que ça résout le problème.</a:t>
+            </a:r>
           </a:p>
         </p:txBody>
       </p:sp>
